--- a/documents/2.6.0/Agenda_S98_March26.pptx
+++ b/documents/2.6.0/Agenda_S98_March26.pptx
@@ -14051,13 +14051,8 @@
           <a:p>
             <a:r>
               <a:rPr lang="en-GB" dirty="0"/>
-              <a:t>TSM is an opportunity to debate some of the more complex topics. Input from these meetings will inform </a:t>
-            </a:r>
-            <a:r>
-              <a:rPr lang="en-GB"/>
-              <a:t>those sessions.</a:t>
-            </a:r>
-            <a:endParaRPr lang="en-GB" dirty="0"/>
+              <a:t>TSM is an opportunity to debate some of the more complex topics. Input from these meetings will inform those sessions.</a:t>
+            </a:r>
           </a:p>
           <a:p>
             <a:endParaRPr lang="en-GB" dirty="0"/>
@@ -14604,7 +14599,7 @@
             <a:pPr lvl="1"/>
             <a:r>
               <a:rPr lang="en-GB" dirty="0"/>
-              <a:t>National Vertical Datum</a:t>
+              <a:t>National High Water and National Low Water Datum</a:t>
             </a:r>
           </a:p>
           <a:p>
